--- a/docs/路演/Pawly-路演-15页-B端.pptx
+++ b/docs/路演/Pawly-路演-15页-B端.pptx
@@ -5372,7 +5372,7 @@
                 <a:ea typeface="微软雅黑" pitchFamily="34" charset="-122"/>
                 <a:cs typeface="微软雅黑" pitchFamily="34" charset="-120"/>
               </a:rPr>
-              <a:t>公司注册启动</a:t>
+              <a:t>首批品类知识库撰写</a:t>
             </a:r>
             <a:endParaRPr lang="en-US" sz="1250" dirty="0"/>
           </a:p>
@@ -7106,8 +7106,8 @@
         </p:nvSpPr>
         <p:spPr>
           <a:xfrm>
-            <a:off x="5549772" y="2513330"/>
-            <a:ext cx="1865376" cy="256032"/>
+            <a:off x="5504688" y="2513330"/>
+            <a:ext cx="1993392" cy="256032"/>
           </a:xfrm>
           <a:prstGeom prst="rect">
             <a:avLst/>
@@ -7140,62 +7140,7 @@
                 <a:ea typeface="微软雅黑"/>
                 <a:cs typeface="微软雅黑"/>
               </a:rPr>
-              <a:t>营业</a:t>
-            </a:r>
-            <a:r>
-              <a:rPr lang="zh-CN" sz="1310" b="1">
-                <a:solidFill>
-                  <a:srgbClr val="C79255"/>
-                </a:solidFill>
-                <a:latin typeface="微软雅黑"/>
-                <a:ea typeface="微软雅黑"/>
-                <a:cs typeface="微软雅黑"/>
-              </a:rPr>
-              <a:t>额 </a:t>
-            </a:r>
-            <a:r>
-              <a:rPr lang="en-US" altLang="zh-CN" sz="1310" b="1">
-                <a:solidFill>
-                  <a:srgbClr val="C79255"/>
-                </a:solidFill>
-                <a:latin typeface="微软雅黑"/>
-                <a:ea typeface="微软雅黑"/>
-                <a:cs typeface="微软雅黑"/>
-              </a:rPr>
-              <a:t>5</a:t>
-            </a:r>
-            <a:r>
-              <a:rPr lang="zh-CN" sz="1310" b="1">
-                <a:solidFill>
-                  <a:srgbClr val="C79255"/>
-                </a:solidFill>
-                <a:latin typeface="微软雅黑"/>
-                <a:ea typeface="微软雅黑"/>
-                <a:cs typeface="微软雅黑"/>
-              </a:rPr>
-              <a:t>00—1,</a:t>
-            </a:r>
-            <a:r>
-              <a:rPr lang="en-US" altLang="zh-CN" sz="1310" b="1">
-                <a:solidFill>
-                  <a:srgbClr val="C79255"/>
-                </a:solidFill>
-                <a:latin typeface="微软雅黑"/>
-                <a:ea typeface="微软雅黑"/>
-                <a:cs typeface="微软雅黑"/>
-              </a:rPr>
-              <a:t>0</a:t>
-            </a:r>
-            <a:r>
-              <a:rPr lang="zh-CN" sz="1310" b="1">
-                <a:solidFill>
-                  <a:srgbClr val="C79255"/>
-                </a:solidFill>
-                <a:latin typeface="微软雅黑"/>
-                <a:ea typeface="微软雅黑"/>
-                <a:cs typeface="微软雅黑"/>
-              </a:rPr>
-              <a:t>00 万元</a:t>
+              <a:t>签约商家 500家</a:t>
             </a:r>
             <a:endParaRPr lang="zh-CN" sz="1310" b="1">
               <a:solidFill>
@@ -7216,8 +7161,8 @@
         </p:nvSpPr>
         <p:spPr>
           <a:xfrm>
-            <a:off x="5549137" y="2883535"/>
-            <a:ext cx="1865376" cy="228600"/>
+            <a:off x="5504688" y="2843784"/>
+            <a:ext cx="1993392" cy="475488"/>
           </a:xfrm>
           <a:prstGeom prst="rect">
             <a:avLst/>
@@ -7250,8 +7195,29 @@
                 <a:ea typeface="微软雅黑"/>
                 <a:cs typeface="微软雅黑"/>
               </a:rPr>
-              <a:t>税前利润</a:t>
-            </a:r>
+              <a:t>营收 500—1,000 万元</a:t>
+            </a:r>
+            <a:endParaRPr lang="zh-CN" sz="1290" b="1">
+              <a:solidFill>
+                <a:srgbClr val="C79255"/>
+              </a:solidFill>
+              <a:latin typeface="微软雅黑"/>
+              <a:ea typeface="微软雅黑"/>
+              <a:cs typeface="微软雅黑"/>
+            </a:endParaRPr>
+          </a:p>
+          <a:p>
+            <a:pPr algn="l">
+              <a:lnSpc>
+                <a:spcPts val="1550"/>
+              </a:lnSpc>
+              <a:spcBef>
+                <a:spcPts val="0"/>
+              </a:spcBef>
+              <a:spcAft>
+                <a:spcPts val="0"/>
+              </a:spcAft>
+            </a:pPr>
             <a:r>
               <a:rPr lang="zh-CN" sz="1290" b="1">
                 <a:solidFill>
@@ -7261,7 +7227,7 @@
                 <a:ea typeface="微软雅黑"/>
                 <a:cs typeface="微软雅黑"/>
               </a:rPr>
-              <a:t>约 75 万元</a:t>
+              <a:t>税前利润约 75 万元</a:t>
             </a:r>
             <a:endParaRPr lang="zh-CN" sz="1290" b="1">
               <a:solidFill>
@@ -10574,11 +10540,7 @@
             </a:pPr>
             <a:r>
               <a:rPr lang="zh-CN" altLang="en-US" sz="1400" dirty="0"/>
-              <a:t>金柳</a:t>
-            </a:r>
-            <a:r>
-              <a:rPr lang="zh-CN" altLang="en-US" sz="1400" dirty="0"/>
-              <a:t>杨</a:t>
+              <a:t>金柳扬</a:t>
             </a:r>
             <a:endParaRPr lang="zh-CN" altLang="en-US" sz="1400" dirty="0"/>
           </a:p>
@@ -11125,6 +11087,37 @@
             <a:r>
               <a:rPr lang="zh-CN" altLang="en-US" sz="1150" dirty="0"/>
               <a:t>赋能</a:t>
+            </a:r>
+            <a:endParaRPr lang="zh-CN" altLang="en-US" sz="1150" dirty="0"/>
+          </a:p>
+        </p:txBody>
+      </p:sp>
+      <p:sp>
+        <p:nvSpPr>
+          <p:cNvPr id="910" name="Text 910"/>
+          <p:cNvSpPr txBox="1"/>
+          <p:nvPr/>
+        </p:nvSpPr>
+        <p:spPr>
+          <a:xfrm>
+            <a:off x="685800" y="5852160"/>
+            <a:ext cx="10817352" cy="256032"/>
+          </a:xfrm>
+          <a:prstGeom prst="rect">
+            <a:avLst/>
+          </a:prstGeom>
+          <a:noFill/>
+        </p:spPr>
+        <p:txBody>
+          <a:bodyPr wrap="square" lIns="0" tIns="0" rIns="0" bIns="0" rtlCol="0" anchor="ctr"/>
+          <a:lstStyle/>
+          <a:p>
+            <a:pPr marL="0" indent="0">
+              <a:buNone/>
+            </a:pPr>
+            <a:r>
+              <a:rPr lang="zh-CN" altLang="en-US" sz="1150" dirty="0"/>
+              <a:t>公司已于 2026.07.21 完成注册 · 注册资本 200 万元</a:t>
             </a:r>
             <a:endParaRPr lang="zh-CN" altLang="en-US" sz="1150" dirty="0"/>
           </a:p>
@@ -13639,7 +13632,7 @@
                 <a:ea typeface="微软雅黑" pitchFamily="34" charset="-122"/>
                 <a:cs typeface="微软雅黑" pitchFamily="34" charset="-120"/>
               </a:rPr>
-              <a:t>800—1,500 万元</a:t>
+              <a:t>500—1,000 万元</a:t>
             </a:r>
             <a:endParaRPr lang="en-US" sz="1900" dirty="0"/>
           </a:p>
